--- a/material/Data Analysis/06_pandas(2).pptx
+++ b/material/Data Analysis/06_pandas(2).pptx
@@ -1,6 +1,6 @@
 
 <file path=ppt/presentation.xml><?xml version="1.0" encoding="utf-8"?>
-<p:presentation xmlns:a="http://schemas.openxmlformats.org/drawingml/2006/main" xmlns:r="http://schemas.openxmlformats.org/officeDocument/2006/relationships" xmlns:p="http://schemas.openxmlformats.org/presentationml/2006/main" saveSubsetFonts="1">
+<p:presentation xmlns:a="http://schemas.openxmlformats.org/drawingml/2006/main" xmlns:r="http://schemas.openxmlformats.org/officeDocument/2006/relationships" xmlns:p="http://schemas.openxmlformats.org/presentationml/2006/main" embedTrueTypeFonts="1" saveSubsetFonts="1">
   <p:sldMasterIdLst>
     <p:sldMasterId id="2147483660" r:id="rId1"/>
   </p:sldMasterIdLst>
@@ -69,6 +69,34 @@
   </p:sldIdLst>
   <p:sldSz cx="12192000" cy="6858000"/>
   <p:notesSz cx="6858000" cy="9144000"/>
+  <p:embeddedFontLst>
+    <p:embeddedFont>
+      <p:font typeface="G마켓 산스 TTF Bold" panose="02000000000000000000" pitchFamily="2" charset="-127"/>
+      <p:bold r:id="rId61"/>
+    </p:embeddedFont>
+    <p:embeddedFont>
+      <p:font typeface="Pretendard Black" panose="02000A03000000020004" pitchFamily="2" charset="-127"/>
+      <p:bold r:id="rId62"/>
+    </p:embeddedFont>
+    <p:embeddedFont>
+      <p:font typeface="Pretendard Light" panose="02000403000000020004" pitchFamily="2" charset="-127"/>
+      <p:regular r:id="rId63"/>
+    </p:embeddedFont>
+    <p:embeddedFont>
+      <p:font typeface="Pretendard Medium" panose="02000603000000020004" pitchFamily="2" charset="-127"/>
+      <p:regular r:id="rId64"/>
+    </p:embeddedFont>
+    <p:embeddedFont>
+      <p:font typeface="맑은 고딕" panose="020B0503020000020004" pitchFamily="50" charset="-127"/>
+      <p:regular r:id="rId65"/>
+      <p:bold r:id="rId66"/>
+    </p:embeddedFont>
+    <p:embeddedFont>
+      <p:font typeface="메이플스토리" panose="02000300000000000000" pitchFamily="2" charset="-127"/>
+      <p:regular r:id="rId67"/>
+      <p:bold r:id="rId68"/>
+    </p:embeddedFont>
+  </p:embeddedFontLst>
   <p:defaultTextStyle>
     <a:defPPr>
       <a:defRPr lang="ko-KR"/>
@@ -275,7 +303,7 @@
             <a:fld id="{A13A867C-D490-40C2-AB8D-A60FA70A9BF5}" type="datetimeFigureOut">
               <a:rPr lang="ko-KR" altLang="en-US" smtClean="0"/>
               <a:pPr/>
-              <a:t>2025-08-07</a:t>
+              <a:t>2025-08-21</a:t>
             </a:fld>
             <a:endParaRPr lang="ko-KR" altLang="en-US" dirty="0"/>
           </a:p>
@@ -6315,7 +6343,7 @@
           <a:p>
             <a:fld id="{442BEE3F-2E9A-4FD8-8B8A-8619F3E161C0}" type="datetime1">
               <a:rPr lang="ko-KR" altLang="en-US" smtClean="0"/>
-              <a:t>2025-08-07</a:t>
+              <a:t>2025-08-21</a:t>
             </a:fld>
             <a:endParaRPr lang="ko-KR" altLang="en-US"/>
           </a:p>
@@ -6602,7 +6630,7 @@
           <a:p>
             <a:fld id="{0F78D9C4-20C1-4B15-A116-16DC77AD9A1E}" type="datetime1">
               <a:rPr lang="ko-KR" altLang="en-US" smtClean="0"/>
-              <a:t>2025-08-07</a:t>
+              <a:t>2025-08-21</a:t>
             </a:fld>
             <a:endParaRPr lang="ko-KR" altLang="en-US"/>
           </a:p>
@@ -6777,7 +6805,7 @@
           <a:p>
             <a:fld id="{7F5E23C3-0E3D-4E4E-8486-D7FB4C073DC1}" type="datetime1">
               <a:rPr lang="ko-KR" altLang="en-US" smtClean="0"/>
-              <a:t>2025-08-07</a:t>
+              <a:t>2025-08-21</a:t>
             </a:fld>
             <a:endParaRPr lang="ko-KR" altLang="en-US"/>
           </a:p>
@@ -7106,7 +7134,7 @@
           <a:p>
             <a:fld id="{7F5E23C3-0E3D-4E4E-8486-D7FB4C073DC1}" type="datetime1">
               <a:rPr lang="ko-KR" altLang="en-US" smtClean="0"/>
-              <a:t>2025-08-07</a:t>
+              <a:t>2025-08-21</a:t>
             </a:fld>
             <a:endParaRPr lang="ko-KR" altLang="en-US"/>
           </a:p>
@@ -7912,7 +7940,7 @@
           <a:p>
             <a:fld id="{0F78D9C4-20C1-4B15-A116-16DC77AD9A1E}" type="datetime1">
               <a:rPr lang="ko-KR" altLang="en-US" smtClean="0"/>
-              <a:t>2025-08-07</a:t>
+              <a:t>2025-08-21</a:t>
             </a:fld>
             <a:endParaRPr lang="ko-KR" altLang="en-US" dirty="0"/>
           </a:p>
@@ -8279,7 +8307,7 @@
           <a:p>
             <a:fld id="{0F78D9C4-20C1-4B15-A116-16DC77AD9A1E}" type="datetime1">
               <a:rPr lang="ko-KR" altLang="en-US" smtClean="0"/>
-              <a:t>2025-08-07</a:t>
+              <a:t>2025-08-21</a:t>
             </a:fld>
             <a:endParaRPr lang="ko-KR" altLang="en-US" dirty="0"/>
           </a:p>
@@ -8789,7 +8817,7 @@
           <a:p>
             <a:fld id="{0F78D9C4-20C1-4B15-A116-16DC77AD9A1E}" type="datetime1">
               <a:rPr lang="ko-KR" altLang="en-US" smtClean="0"/>
-              <a:t>2025-08-07</a:t>
+              <a:t>2025-08-21</a:t>
             </a:fld>
             <a:endParaRPr lang="ko-KR" altLang="en-US" dirty="0"/>
           </a:p>
@@ -9508,7 +9536,7 @@
           <a:p>
             <a:fld id="{0F78D9C4-20C1-4B15-A116-16DC77AD9A1E}" type="datetime1">
               <a:rPr lang="ko-KR" altLang="en-US" smtClean="0"/>
-              <a:t>2025-08-07</a:t>
+              <a:t>2025-08-21</a:t>
             </a:fld>
             <a:endParaRPr lang="ko-KR" altLang="en-US"/>
           </a:p>
@@ -9905,7 +9933,7 @@
           <a:p>
             <a:fld id="{0F78D9C4-20C1-4B15-A116-16DC77AD9A1E}" type="datetime1">
               <a:rPr lang="ko-KR" altLang="en-US" smtClean="0"/>
-              <a:t>2025-08-07</a:t>
+              <a:t>2025-08-21</a:t>
             </a:fld>
             <a:endParaRPr lang="ko-KR" altLang="en-US"/>
           </a:p>
@@ -10314,7 +10342,7 @@
           <a:p>
             <a:fld id="{0F78D9C4-20C1-4B15-A116-16DC77AD9A1E}" type="datetime1">
               <a:rPr lang="ko-KR" altLang="en-US" smtClean="0"/>
-              <a:t>2025-08-07</a:t>
+              <a:t>2025-08-21</a:t>
             </a:fld>
             <a:endParaRPr lang="ko-KR" altLang="en-US"/>
           </a:p>
@@ -10549,7 +10577,7 @@
           <a:p>
             <a:fld id="{0F78D9C4-20C1-4B15-A116-16DC77AD9A1E}" type="datetime1">
               <a:rPr lang="ko-KR" altLang="en-US" smtClean="0"/>
-              <a:t>2025-08-07</a:t>
+              <a:t>2025-08-21</a:t>
             </a:fld>
             <a:endParaRPr lang="ko-KR" altLang="en-US" dirty="0"/>
           </a:p>
@@ -10817,7 +10845,7 @@
           <a:p>
             <a:fld id="{0F78D9C4-20C1-4B15-A116-16DC77AD9A1E}" type="datetime1">
               <a:rPr lang="ko-KR" altLang="en-US" smtClean="0"/>
-              <a:t>2025-08-07</a:t>
+              <a:t>2025-08-21</a:t>
             </a:fld>
             <a:endParaRPr lang="ko-KR" altLang="en-US" dirty="0"/>
           </a:p>
@@ -11061,7 +11089,7 @@
           <a:p>
             <a:fld id="{0F78D9C4-20C1-4B15-A116-16DC77AD9A1E}" type="datetime1">
               <a:rPr lang="ko-KR" altLang="en-US" smtClean="0"/>
-              <a:t>2025-08-07</a:t>
+              <a:t>2025-08-21</a:t>
             </a:fld>
             <a:endParaRPr lang="ko-KR" altLang="en-US" dirty="0"/>
           </a:p>
@@ -11409,7 +11437,7 @@
           <a:p>
             <a:fld id="{0F78D9C4-20C1-4B15-A116-16DC77AD9A1E}" type="datetime1">
               <a:rPr lang="ko-KR" altLang="en-US" smtClean="0"/>
-              <a:t>2025-08-07</a:t>
+              <a:t>2025-08-21</a:t>
             </a:fld>
             <a:endParaRPr lang="ko-KR" altLang="en-US" dirty="0"/>
           </a:p>
@@ -11694,7 +11722,7 @@
           <a:p>
             <a:fld id="{0F78D9C4-20C1-4B15-A116-16DC77AD9A1E}" type="datetime1">
               <a:rPr lang="ko-KR" altLang="en-US" smtClean="0"/>
-              <a:t>2025-08-07</a:t>
+              <a:t>2025-08-21</a:t>
             </a:fld>
             <a:endParaRPr lang="ko-KR" altLang="en-US" dirty="0"/>
           </a:p>
@@ -12351,7 +12379,7 @@
           <a:p>
             <a:fld id="{0F78D9C4-20C1-4B15-A116-16DC77AD9A1E}" type="datetime1">
               <a:rPr lang="ko-KR" altLang="en-US" smtClean="0"/>
-              <a:t>2025-08-07</a:t>
+              <a:t>2025-08-21</a:t>
             </a:fld>
             <a:endParaRPr lang="ko-KR" altLang="en-US" dirty="0"/>
           </a:p>
@@ -12667,7 +12695,7 @@
           <a:p>
             <a:fld id="{0F78D9C4-20C1-4B15-A116-16DC77AD9A1E}" type="datetime1">
               <a:rPr lang="ko-KR" altLang="en-US" smtClean="0"/>
-              <a:t>2025-08-07</a:t>
+              <a:t>2025-08-21</a:t>
             </a:fld>
             <a:endParaRPr lang="ko-KR" altLang="en-US" dirty="0"/>
           </a:p>
@@ -12871,7 +12899,7 @@
           <a:p>
             <a:fld id="{0F78D9C4-20C1-4B15-A116-16DC77AD9A1E}" type="datetime1">
               <a:rPr lang="ko-KR" altLang="en-US" smtClean="0"/>
-              <a:t>2025-08-07</a:t>
+              <a:t>2025-08-21</a:t>
             </a:fld>
             <a:endParaRPr lang="ko-KR" altLang="en-US" dirty="0"/>
           </a:p>
@@ -13451,7 +13479,7 @@
           <a:p>
             <a:fld id="{0F78D9C4-20C1-4B15-A116-16DC77AD9A1E}" type="datetime1">
               <a:rPr lang="ko-KR" altLang="en-US" smtClean="0"/>
-              <a:t>2025-08-07</a:t>
+              <a:t>2025-08-21</a:t>
             </a:fld>
             <a:endParaRPr lang="ko-KR" altLang="en-US"/>
           </a:p>
@@ -13816,7 +13844,7 @@
           <a:p>
             <a:fld id="{0F78D9C4-20C1-4B15-A116-16DC77AD9A1E}" type="datetime1">
               <a:rPr lang="ko-KR" altLang="en-US" smtClean="0"/>
-              <a:t>2025-08-07</a:t>
+              <a:t>2025-08-21</a:t>
             </a:fld>
             <a:endParaRPr lang="ko-KR" altLang="en-US"/>
           </a:p>
@@ -14220,7 +14248,7 @@
           <a:p>
             <a:fld id="{0F78D9C4-20C1-4B15-A116-16DC77AD9A1E}" type="datetime1">
               <a:rPr lang="ko-KR" altLang="en-US" smtClean="0"/>
-              <a:t>2025-08-07</a:t>
+              <a:t>2025-08-21</a:t>
             </a:fld>
             <a:endParaRPr lang="ko-KR" altLang="en-US"/>
           </a:p>
@@ -14592,7 +14620,7 @@
           <a:p>
             <a:fld id="{0F78D9C4-20C1-4B15-A116-16DC77AD9A1E}" type="datetime1">
               <a:rPr lang="ko-KR" altLang="en-US" smtClean="0"/>
-              <a:t>2025-08-07</a:t>
+              <a:t>2025-08-21</a:t>
             </a:fld>
             <a:endParaRPr lang="ko-KR" altLang="en-US"/>
           </a:p>
@@ -15077,7 +15105,7 @@
           <a:p>
             <a:fld id="{0F78D9C4-20C1-4B15-A116-16DC77AD9A1E}" type="datetime1">
               <a:rPr lang="ko-KR" altLang="en-US" smtClean="0"/>
-              <a:t>2025-08-07</a:t>
+              <a:t>2025-08-21</a:t>
             </a:fld>
             <a:endParaRPr lang="ko-KR" altLang="en-US"/>
           </a:p>
@@ -15255,7 +15283,7 @@
           <a:p>
             <a:fld id="{0F78D9C4-20C1-4B15-A116-16DC77AD9A1E}" type="datetime1">
               <a:rPr lang="ko-KR" altLang="en-US" smtClean="0"/>
-              <a:t>2025-08-07</a:t>
+              <a:t>2025-08-21</a:t>
             </a:fld>
             <a:endParaRPr lang="ko-KR" altLang="en-US" dirty="0"/>
           </a:p>
@@ -18498,7 +18526,7 @@
           <a:p>
             <a:fld id="{0F78D9C4-20C1-4B15-A116-16DC77AD9A1E}" type="datetime1">
               <a:rPr lang="ko-KR" altLang="en-US" smtClean="0"/>
-              <a:t>2025-08-07</a:t>
+              <a:t>2025-08-21</a:t>
             </a:fld>
             <a:endParaRPr lang="ko-KR" altLang="en-US" dirty="0"/>
           </a:p>
@@ -18879,7 +18907,7 @@
           <a:p>
             <a:fld id="{0F78D9C4-20C1-4B15-A116-16DC77AD9A1E}" type="datetime1">
               <a:rPr lang="ko-KR" altLang="en-US" smtClean="0"/>
-              <a:t>2025-08-07</a:t>
+              <a:t>2025-08-21</a:t>
             </a:fld>
             <a:endParaRPr lang="ko-KR" altLang="en-US" dirty="0"/>
           </a:p>
@@ -19407,7 +19435,7 @@
           <a:p>
             <a:fld id="{0F78D9C4-20C1-4B15-A116-16DC77AD9A1E}" type="datetime1">
               <a:rPr lang="ko-KR" altLang="en-US" smtClean="0"/>
-              <a:t>2025-08-07</a:t>
+              <a:t>2025-08-21</a:t>
             </a:fld>
             <a:endParaRPr lang="ko-KR" altLang="en-US" dirty="0"/>
           </a:p>
@@ -19587,7 +19615,7 @@
           <a:p>
             <a:fld id="{0F78D9C4-20C1-4B15-A116-16DC77AD9A1E}" type="datetime1">
               <a:rPr lang="ko-KR" altLang="en-US" smtClean="0"/>
-              <a:t>2025-08-07</a:t>
+              <a:t>2025-08-21</a:t>
             </a:fld>
             <a:endParaRPr lang="ko-KR" altLang="en-US" dirty="0"/>
           </a:p>
@@ -20094,7 +20122,7 @@
           <a:p>
             <a:fld id="{0F78D9C4-20C1-4B15-A116-16DC77AD9A1E}" type="datetime1">
               <a:rPr lang="ko-KR" altLang="en-US" smtClean="0"/>
-              <a:t>2025-08-07</a:t>
+              <a:t>2025-08-21</a:t>
             </a:fld>
             <a:endParaRPr lang="ko-KR" altLang="en-US" dirty="0"/>
           </a:p>
@@ -20504,7 +20532,7 @@
           <a:p>
             <a:fld id="{0F78D9C4-20C1-4B15-A116-16DC77AD9A1E}" type="datetime1">
               <a:rPr lang="ko-KR" altLang="en-US" smtClean="0"/>
-              <a:t>2025-08-07</a:t>
+              <a:t>2025-08-21</a:t>
             </a:fld>
             <a:endParaRPr lang="ko-KR" altLang="en-US" dirty="0"/>
           </a:p>
@@ -20955,7 +20983,7 @@
           <a:p>
             <a:fld id="{0F78D9C4-20C1-4B15-A116-16DC77AD9A1E}" type="datetime1">
               <a:rPr lang="ko-KR" altLang="en-US" smtClean="0"/>
-              <a:t>2025-08-07</a:t>
+              <a:t>2025-08-21</a:t>
             </a:fld>
             <a:endParaRPr lang="ko-KR" altLang="en-US" dirty="0"/>
           </a:p>
@@ -21180,7 +21208,7 @@
           <a:p>
             <a:fld id="{0F78D9C4-20C1-4B15-A116-16DC77AD9A1E}" type="datetime1">
               <a:rPr lang="ko-KR" altLang="en-US" smtClean="0"/>
-              <a:t>2025-08-07</a:t>
+              <a:t>2025-08-21</a:t>
             </a:fld>
             <a:endParaRPr lang="ko-KR" altLang="en-US" dirty="0"/>
           </a:p>
@@ -21936,7 +21964,7 @@
           <a:p>
             <a:fld id="{0F78D9C4-20C1-4B15-A116-16DC77AD9A1E}" type="datetime1">
               <a:rPr lang="ko-KR" altLang="en-US" smtClean="0"/>
-              <a:t>2025-08-07</a:t>
+              <a:t>2025-08-21</a:t>
             </a:fld>
             <a:endParaRPr lang="ko-KR" altLang="en-US"/>
           </a:p>
@@ -22325,7 +22353,7 @@
           <a:p>
             <a:fld id="{0F78D9C4-20C1-4B15-A116-16DC77AD9A1E}" type="datetime1">
               <a:rPr lang="ko-KR" altLang="en-US" smtClean="0"/>
-              <a:t>2025-08-07</a:t>
+              <a:t>2025-08-21</a:t>
             </a:fld>
             <a:endParaRPr lang="ko-KR" altLang="en-US"/>
           </a:p>
@@ -22605,7 +22633,7 @@
           <a:p>
             <a:fld id="{0F78D9C4-20C1-4B15-A116-16DC77AD9A1E}" type="datetime1">
               <a:rPr lang="ko-KR" altLang="en-US" smtClean="0"/>
-              <a:t>2025-08-07</a:t>
+              <a:t>2025-08-21</a:t>
             </a:fld>
             <a:endParaRPr lang="ko-KR" altLang="en-US"/>
           </a:p>
@@ -22794,7 +22822,7 @@
           <a:p>
             <a:fld id="{0F78D9C4-20C1-4B15-A116-16DC77AD9A1E}" type="datetime1">
               <a:rPr lang="ko-KR" altLang="en-US" smtClean="0"/>
-              <a:t>2025-08-07</a:t>
+              <a:t>2025-08-21</a:t>
             </a:fld>
             <a:endParaRPr lang="ko-KR" altLang="en-US" dirty="0"/>
           </a:p>
@@ -23224,7 +23252,7 @@
           <a:p>
             <a:fld id="{0F78D9C4-20C1-4B15-A116-16DC77AD9A1E}" type="datetime1">
               <a:rPr lang="ko-KR" altLang="en-US" smtClean="0"/>
-              <a:t>2025-08-07</a:t>
+              <a:t>2025-08-21</a:t>
             </a:fld>
             <a:endParaRPr lang="ko-KR" altLang="en-US" dirty="0"/>
           </a:p>
@@ -23460,7 +23488,7 @@
           <a:p>
             <a:fld id="{0F78D9C4-20C1-4B15-A116-16DC77AD9A1E}" type="datetime1">
               <a:rPr lang="ko-KR" altLang="en-US" smtClean="0"/>
-              <a:t>2025-08-07</a:t>
+              <a:t>2025-08-21</a:t>
             </a:fld>
             <a:endParaRPr lang="ko-KR" altLang="en-US" dirty="0"/>
           </a:p>
@@ -23906,7 +23934,7 @@
           <a:p>
             <a:fld id="{0F78D9C4-20C1-4B15-A116-16DC77AD9A1E}" type="datetime1">
               <a:rPr lang="ko-KR" altLang="en-US" smtClean="0"/>
-              <a:t>2025-08-07</a:t>
+              <a:t>2025-08-21</a:t>
             </a:fld>
             <a:endParaRPr lang="ko-KR" altLang="en-US" dirty="0"/>
           </a:p>
@@ -24152,7 +24180,7 @@
           <a:p>
             <a:fld id="{0F78D9C4-20C1-4B15-A116-16DC77AD9A1E}" type="datetime1">
               <a:rPr lang="ko-KR" altLang="en-US" smtClean="0"/>
-              <a:t>2025-08-07</a:t>
+              <a:t>2025-08-21</a:t>
             </a:fld>
             <a:endParaRPr lang="ko-KR" altLang="en-US" dirty="0"/>
           </a:p>
@@ -24405,7 +24433,7 @@
           <a:p>
             <a:fld id="{0F78D9C4-20C1-4B15-A116-16DC77AD9A1E}" type="datetime1">
               <a:rPr lang="ko-KR" altLang="en-US" smtClean="0"/>
-              <a:t>2025-08-07</a:t>
+              <a:t>2025-08-21</a:t>
             </a:fld>
             <a:endParaRPr lang="ko-KR" altLang="en-US" dirty="0"/>
           </a:p>
@@ -24658,7 +24686,7 @@
           <a:p>
             <a:fld id="{0F78D9C4-20C1-4B15-A116-16DC77AD9A1E}" type="datetime1">
               <a:rPr lang="ko-KR" altLang="en-US" smtClean="0"/>
-              <a:t>2025-08-07</a:t>
+              <a:t>2025-08-21</a:t>
             </a:fld>
             <a:endParaRPr lang="ko-KR" altLang="en-US" dirty="0"/>
           </a:p>
@@ -24911,7 +24939,7 @@
           <a:p>
             <a:fld id="{0F78D9C4-20C1-4B15-A116-16DC77AD9A1E}" type="datetime1">
               <a:rPr lang="ko-KR" altLang="en-US" smtClean="0"/>
-              <a:t>2025-08-07</a:t>
+              <a:t>2025-08-21</a:t>
             </a:fld>
             <a:endParaRPr lang="ko-KR" altLang="en-US" dirty="0"/>
           </a:p>
@@ -25207,7 +25235,7 @@
           <a:p>
             <a:fld id="{0F78D9C4-20C1-4B15-A116-16DC77AD9A1E}" type="datetime1">
               <a:rPr lang="ko-KR" altLang="en-US" smtClean="0"/>
-              <a:t>2025-08-07</a:t>
+              <a:t>2025-08-21</a:t>
             </a:fld>
             <a:endParaRPr lang="ko-KR" altLang="en-US" dirty="0"/>
           </a:p>
@@ -25604,7 +25632,7 @@
           <a:p>
             <a:fld id="{0F78D9C4-20C1-4B15-A116-16DC77AD9A1E}" type="datetime1">
               <a:rPr lang="ko-KR" altLang="en-US" smtClean="0"/>
-              <a:t>2025-08-07</a:t>
+              <a:t>2025-08-21</a:t>
             </a:fld>
             <a:endParaRPr lang="ko-KR" altLang="en-US" dirty="0"/>
           </a:p>
@@ -25908,7 +25936,7 @@
           <a:p>
             <a:fld id="{0F78D9C4-20C1-4B15-A116-16DC77AD9A1E}" type="datetime1">
               <a:rPr lang="ko-KR" altLang="en-US" smtClean="0"/>
-              <a:t>2025-08-07</a:t>
+              <a:t>2025-08-21</a:t>
             </a:fld>
             <a:endParaRPr lang="ko-KR" altLang="en-US" dirty="0"/>
           </a:p>
@@ -26196,7 +26224,7 @@
           <a:p>
             <a:fld id="{0F78D9C4-20C1-4B15-A116-16DC77AD9A1E}" type="datetime1">
               <a:rPr lang="ko-KR" altLang="en-US" smtClean="0"/>
-              <a:t>2025-08-07</a:t>
+              <a:t>2025-08-21</a:t>
             </a:fld>
             <a:endParaRPr lang="ko-KR" altLang="en-US" dirty="0"/>
           </a:p>
@@ -26512,7 +26540,7 @@
           <a:p>
             <a:fld id="{0F78D9C4-20C1-4B15-A116-16DC77AD9A1E}" type="datetime1">
               <a:rPr lang="ko-KR" altLang="en-US" smtClean="0"/>
-              <a:t>2025-08-07</a:t>
+              <a:t>2025-08-21</a:t>
             </a:fld>
             <a:endParaRPr lang="ko-KR" altLang="en-US" dirty="0"/>
           </a:p>
@@ -26808,7 +26836,7 @@
           <a:p>
             <a:fld id="{0F78D9C4-20C1-4B15-A116-16DC77AD9A1E}" type="datetime1">
               <a:rPr lang="ko-KR" altLang="en-US" smtClean="0"/>
-              <a:t>2025-08-07</a:t>
+              <a:t>2025-08-21</a:t>
             </a:fld>
             <a:endParaRPr lang="ko-KR" altLang="en-US" dirty="0"/>
           </a:p>
@@ -27002,7 +27030,7 @@
           <a:p>
             <a:fld id="{0F78D9C4-20C1-4B15-A116-16DC77AD9A1E}" type="datetime1">
               <a:rPr lang="ko-KR" altLang="en-US" smtClean="0"/>
-              <a:t>2025-08-07</a:t>
+              <a:t>2025-08-21</a:t>
             </a:fld>
             <a:endParaRPr lang="ko-KR" altLang="en-US" dirty="0"/>
           </a:p>
@@ -27467,7 +27495,7 @@
           <a:p>
             <a:fld id="{0F78D9C4-20C1-4B15-A116-16DC77AD9A1E}" type="datetime1">
               <a:rPr lang="ko-KR" altLang="en-US" smtClean="0"/>
-              <a:t>2025-08-07</a:t>
+              <a:t>2025-08-21</a:t>
             </a:fld>
             <a:endParaRPr lang="ko-KR" altLang="en-US" dirty="0"/>
           </a:p>
@@ -27688,7 +27716,7 @@
           <a:p>
             <a:fld id="{0F78D9C4-20C1-4B15-A116-16DC77AD9A1E}" type="datetime1">
               <a:rPr lang="ko-KR" altLang="en-US" smtClean="0"/>
-              <a:t>2025-08-07</a:t>
+              <a:t>2025-08-21</a:t>
             </a:fld>
             <a:endParaRPr lang="ko-KR" altLang="en-US" dirty="0"/>
           </a:p>
@@ -27992,7 +28020,7 @@
           <a:p>
             <a:fld id="{0F78D9C4-20C1-4B15-A116-16DC77AD9A1E}" type="datetime1">
               <a:rPr lang="ko-KR" altLang="en-US" smtClean="0"/>
-              <a:t>2025-08-07</a:t>
+              <a:t>2025-08-21</a:t>
             </a:fld>
             <a:endParaRPr lang="ko-KR" altLang="en-US" dirty="0"/>
           </a:p>
